--- a/semaine_03/420905_semaine3.pptx
+++ b/semaine_03/420905_semaine3.pptx
@@ -1830,7 +1830,7 @@
           <a:p>
             <a:fld id="{CFA36C02-C10D-4F70-ADA5-0F3523AD6F2E}" type="datetimeFigureOut">
               <a:rPr lang="fr-CA" smtClean="0"/>
-              <a:t>2022-09-03</a:t>
+              <a:t>2022-09-05</a:t>
             </a:fld>
             <a:endParaRPr lang="fr-CA"/>
           </a:p>
@@ -2266,7 +2266,7 @@
           <a:p>
             <a:r>
               <a:rPr lang="fr-CA"/>
-              <a:t>Semaine peut-être 3</a:t>
+              <a:t>Semaine 3</a:t>
             </a:r>
           </a:p>
         </p:txBody>
@@ -7521,12 +7521,40 @@
             </a:r>
             <a:r>
               <a:rPr lang="fr-CA" dirty="0"/>
-              <a:t> de l’</a:t>
-            </a:r>
-            <a:r>
-              <a:rPr lang="fr-CA" b="1" dirty="0"/>
+              <a:t> </a:t>
+            </a:r>
+            <a:r>
+              <a:rPr lang="fr-CA"/>
+              <a:t>de l’</a:t>
+            </a:r>
+            <a:r>
+              <a:rPr lang="fr-CA" b="1"/>
               <a:t>élément</a:t>
             </a:r>
+          </a:p>
+          <a:p>
+            <a:pPr lvl="2"/>
+            <a:r>
+              <a:rPr lang="fr-CA" b="1"/>
+              <a:t> </a:t>
+            </a:r>
+            <a:r>
+              <a:rPr lang="fr-CA"/>
+              <a:t>L’</a:t>
+            </a:r>
+            <a:r>
+              <a:rPr lang="fr-CA" b="1"/>
+              <a:t>opacité</a:t>
+            </a:r>
+            <a:r>
+              <a:rPr lang="fr-CA"/>
+              <a:t> d’un </a:t>
+            </a:r>
+            <a:r>
+              <a:rPr lang="fr-CA" b="1"/>
+              <a:t>élément</a:t>
+            </a:r>
+            <a:endParaRPr lang="fr-CA" b="1" dirty="0"/>
           </a:p>
           <a:p>
             <a:pPr lvl="2"/>
@@ -15260,13 +15288,13 @@
 </file>
 
 <file path=customXml/itemProps1.xml><?xml version="1.0" encoding="utf-8"?>
-<ds:datastoreItem xmlns:ds="http://schemas.openxmlformats.org/officeDocument/2006/customXml" ds:itemID="{26831772-8E89-4469-B533-F7D26C66C477}"/>
+<ds:datastoreItem xmlns:ds="http://schemas.openxmlformats.org/officeDocument/2006/customXml" ds:itemID="{A5D4AE9F-B01C-455F-A14D-6ED46E899AA8}"/>
 </file>
 
 <file path=customXml/itemProps2.xml><?xml version="1.0" encoding="utf-8"?>
-<ds:datastoreItem xmlns:ds="http://schemas.openxmlformats.org/officeDocument/2006/customXml" ds:itemID="{29A08B08-EAB2-4491-9FC7-D1B5C169446C}"/>
+<ds:datastoreItem xmlns:ds="http://schemas.openxmlformats.org/officeDocument/2006/customXml" ds:itemID="{B4652E77-4955-493E-BE66-838A23DC46A5}"/>
 </file>
 
 <file path=customXml/itemProps3.xml><?xml version="1.0" encoding="utf-8"?>
-<ds:datastoreItem xmlns:ds="http://schemas.openxmlformats.org/officeDocument/2006/customXml" ds:itemID="{8DEE9F54-0ACC-4E01-A079-CCF56A1FBF9D}"/>
+<ds:datastoreItem xmlns:ds="http://schemas.openxmlformats.org/officeDocument/2006/customXml" ds:itemID="{6CFAAF9F-4D91-4A53-AD87-F90AE21F3406}"/>
 </file>
--- a/semaine_03/420905_semaine3.pptx
+++ b/semaine_03/420905_semaine3.pptx
@@ -2,40 +2,40 @@
 <file path=ppt/presentation.xml><?xml version="1.0" encoding="utf-8"?>
 <p:presentation xmlns:a="http://schemas.openxmlformats.org/drawingml/2006/main" xmlns:r="http://schemas.openxmlformats.org/officeDocument/2006/relationships" xmlns:p="http://schemas.openxmlformats.org/presentationml/2006/main" saveSubsetFonts="1">
   <p:sldMasterIdLst>
-    <p:sldMasterId id="2147483648" r:id="rId1"/>
+    <p:sldMasterId id="2147483648" r:id="rId4"/>
   </p:sldMasterIdLst>
   <p:sldIdLst>
-    <p:sldId id="256" r:id="rId2"/>
-    <p:sldId id="310" r:id="rId3"/>
-    <p:sldId id="260" r:id="rId4"/>
-    <p:sldId id="261" r:id="rId5"/>
-    <p:sldId id="262" r:id="rId6"/>
-    <p:sldId id="264" r:id="rId7"/>
-    <p:sldId id="263" r:id="rId8"/>
-    <p:sldId id="319" r:id="rId9"/>
-    <p:sldId id="320" r:id="rId10"/>
-    <p:sldId id="313" r:id="rId11"/>
-    <p:sldId id="314" r:id="rId12"/>
-    <p:sldId id="315" r:id="rId13"/>
-    <p:sldId id="317" r:id="rId14"/>
-    <p:sldId id="321" r:id="rId15"/>
-    <p:sldId id="295" r:id="rId16"/>
-    <p:sldId id="304" r:id="rId17"/>
-    <p:sldId id="306" r:id="rId18"/>
-    <p:sldId id="305" r:id="rId19"/>
-    <p:sldId id="307" r:id="rId20"/>
-    <p:sldId id="281" r:id="rId21"/>
-    <p:sldId id="282" r:id="rId22"/>
-    <p:sldId id="284" r:id="rId23"/>
-    <p:sldId id="285" r:id="rId24"/>
-    <p:sldId id="308" r:id="rId25"/>
-    <p:sldId id="318" r:id="rId26"/>
-    <p:sldId id="286" r:id="rId27"/>
-    <p:sldId id="280" r:id="rId28"/>
-    <p:sldId id="322" r:id="rId29"/>
-    <p:sldId id="298" r:id="rId30"/>
-    <p:sldId id="299" r:id="rId31"/>
-    <p:sldId id="300" r:id="rId32"/>
+    <p:sldId id="256" r:id="rId5"/>
+    <p:sldId id="310" r:id="rId6"/>
+    <p:sldId id="260" r:id="rId7"/>
+    <p:sldId id="261" r:id="rId8"/>
+    <p:sldId id="262" r:id="rId9"/>
+    <p:sldId id="264" r:id="rId10"/>
+    <p:sldId id="263" r:id="rId11"/>
+    <p:sldId id="319" r:id="rId12"/>
+    <p:sldId id="320" r:id="rId13"/>
+    <p:sldId id="313" r:id="rId14"/>
+    <p:sldId id="314" r:id="rId15"/>
+    <p:sldId id="315" r:id="rId16"/>
+    <p:sldId id="317" r:id="rId17"/>
+    <p:sldId id="321" r:id="rId18"/>
+    <p:sldId id="295" r:id="rId19"/>
+    <p:sldId id="304" r:id="rId20"/>
+    <p:sldId id="306" r:id="rId21"/>
+    <p:sldId id="305" r:id="rId22"/>
+    <p:sldId id="307" r:id="rId23"/>
+    <p:sldId id="281" r:id="rId24"/>
+    <p:sldId id="282" r:id="rId25"/>
+    <p:sldId id="284" r:id="rId26"/>
+    <p:sldId id="285" r:id="rId27"/>
+    <p:sldId id="308" r:id="rId28"/>
+    <p:sldId id="318" r:id="rId29"/>
+    <p:sldId id="286" r:id="rId30"/>
+    <p:sldId id="280" r:id="rId31"/>
+    <p:sldId id="322" r:id="rId32"/>
+    <p:sldId id="298" r:id="rId33"/>
+    <p:sldId id="299" r:id="rId34"/>
+    <p:sldId id="300" r:id="rId35"/>
   </p:sldIdLst>
   <p:sldSz cx="12192000" cy="6858000"/>
   <p:notesSz cx="6858000" cy="9144000"/>
@@ -1830,7 +1830,7 @@
           <a:p>
             <a:fld id="{CFA36C02-C10D-4F70-ADA5-0F3523AD6F2E}" type="datetimeFigureOut">
               <a:rPr lang="fr-CA" smtClean="0"/>
-              <a:t>2022-09-05</a:t>
+              <a:t>2022-09-10</a:t>
             </a:fld>
             <a:endParaRPr lang="fr-CA"/>
           </a:p>
@@ -1920,7 +1920,7 @@
           <a:p>
             <a:fld id="{C2CBE6A3-4AEF-4734-8AB8-E4DE745DFB5E}" type="slidenum">
               <a:rPr lang="fr-CA" smtClean="0"/>
-              <a:t>‹N°›</a:t>
+              <a:t>‹n°›</a:t>
             </a:fld>
             <a:endParaRPr lang="fr-CA"/>
           </a:p>
@@ -7422,7 +7422,7 @@
                 <a:latin typeface="Courier New" panose="02070309020205020404" pitchFamily="49" charset="0"/>
                 <a:cs typeface="Courier New" panose="02070309020205020404" pitchFamily="49" charset="0"/>
               </a:rPr>
-              <a:t>document.getElementById</a:t>
+              <a:t>document.querySelector</a:t>
             </a:r>
             <a:r>
               <a:rPr lang="fr-CA" b="1" dirty="0">
@@ -7449,18 +7449,13 @@
             <a:pPr lvl="1"/>
             <a:r>
               <a:rPr lang="fr-CA" dirty="0"/>
-              <a:t> Nous allons voir </a:t>
-            </a:r>
-            <a:r>
-              <a:rPr lang="fr-CA"/>
-              <a:t>comment changer...</a:t>
-            </a:r>
-            <a:endParaRPr lang="fr-CA" dirty="0"/>
+              <a:t> Nous allons voir comment changer...</a:t>
+            </a:r>
           </a:p>
           <a:p>
             <a:pPr lvl="2"/>
             <a:r>
-              <a:rPr lang="fr-CA"/>
+              <a:rPr lang="fr-CA" dirty="0"/>
               <a:t> La </a:t>
             </a:r>
             <a:r>
@@ -7471,7 +7466,7 @@
           <a:p>
             <a:pPr lvl="2"/>
             <a:r>
-              <a:rPr lang="fr-CA"/>
+              <a:rPr lang="fr-CA" dirty="0"/>
               <a:t> La </a:t>
             </a:r>
             <a:r>
@@ -7482,7 +7477,7 @@
           <a:p>
             <a:pPr lvl="2"/>
             <a:r>
-              <a:rPr lang="fr-CA"/>
+              <a:rPr lang="fr-CA" dirty="0"/>
               <a:t> La </a:t>
             </a:r>
             <a:r>
@@ -7493,7 +7488,7 @@
           <a:p>
             <a:pPr lvl="2"/>
             <a:r>
-              <a:rPr lang="fr-CA"/>
+              <a:rPr lang="fr-CA" dirty="0"/>
               <a:t> La </a:t>
             </a:r>
             <a:r>
@@ -7504,7 +7499,7 @@
           <a:p>
             <a:pPr lvl="2"/>
             <a:r>
-              <a:rPr lang="fr-CA"/>
+              <a:rPr lang="fr-CA" dirty="0"/>
               <a:t> La </a:t>
             </a:r>
             <a:r>
@@ -7521,45 +7516,40 @@
             </a:r>
             <a:r>
               <a:rPr lang="fr-CA" dirty="0"/>
+              <a:t> de l’</a:t>
+            </a:r>
+            <a:r>
+              <a:rPr lang="fr-CA" b="1" dirty="0"/>
+              <a:t>élément</a:t>
+            </a:r>
+          </a:p>
+          <a:p>
+            <a:pPr lvl="2"/>
+            <a:r>
+              <a:rPr lang="fr-CA" b="1" dirty="0"/>
               <a:t> </a:t>
             </a:r>
             <a:r>
-              <a:rPr lang="fr-CA"/>
-              <a:t>de l’</a:t>
-            </a:r>
-            <a:r>
-              <a:rPr lang="fr-CA" b="1"/>
+              <a:rPr lang="fr-CA" dirty="0"/>
+              <a:t>L’</a:t>
+            </a:r>
+            <a:r>
+              <a:rPr lang="fr-CA" b="1" dirty="0"/>
+              <a:t>opacité</a:t>
+            </a:r>
+            <a:r>
+              <a:rPr lang="fr-CA" dirty="0"/>
+              <a:t> d’un </a:t>
+            </a:r>
+            <a:r>
+              <a:rPr lang="fr-CA" b="1" dirty="0"/>
               <a:t>élément</a:t>
             </a:r>
           </a:p>
           <a:p>
             <a:pPr lvl="2"/>
             <a:r>
-              <a:rPr lang="fr-CA" b="1"/>
-              <a:t> </a:t>
-            </a:r>
-            <a:r>
-              <a:rPr lang="fr-CA"/>
-              <a:t>L’</a:t>
-            </a:r>
-            <a:r>
-              <a:rPr lang="fr-CA" b="1"/>
-              <a:t>opacité</a:t>
-            </a:r>
-            <a:r>
-              <a:rPr lang="fr-CA"/>
-              <a:t> d’un </a:t>
-            </a:r>
-            <a:r>
-              <a:rPr lang="fr-CA" b="1"/>
-              <a:t>élément</a:t>
-            </a:r>
-            <a:endParaRPr lang="fr-CA" b="1" dirty="0"/>
-          </a:p>
-          <a:p>
-            <a:pPr lvl="2"/>
-            <a:r>
-              <a:rPr lang="fr-CA"/>
+              <a:rPr lang="fr-CA" dirty="0"/>
               <a:t> La </a:t>
             </a:r>
             <a:r>
@@ -7568,40 +7558,35 @@
             </a:r>
             <a:r>
               <a:rPr lang="fr-CA" dirty="0"/>
+              <a:t> d’un </a:t>
+            </a:r>
+            <a:r>
+              <a:rPr lang="fr-CA" b="1" dirty="0"/>
+              <a:t>élément</a:t>
+            </a:r>
+          </a:p>
+          <a:p>
+            <a:pPr lvl="2"/>
+            <a:r>
+              <a:rPr lang="fr-CA" b="1" dirty="0"/>
               <a:t> </a:t>
             </a:r>
             <a:r>
-              <a:rPr lang="fr-CA"/>
-              <a:t>d’un </a:t>
-            </a:r>
-            <a:r>
-              <a:rPr lang="fr-CA" b="1"/>
-              <a:t>élément</a:t>
-            </a:r>
-          </a:p>
-          <a:p>
-            <a:pPr lvl="2"/>
-            <a:r>
-              <a:rPr lang="fr-CA" b="1"/>
-              <a:t> </a:t>
-            </a:r>
-            <a:r>
-              <a:rPr lang="fr-CA"/>
+              <a:rPr lang="fr-CA" dirty="0"/>
               <a:t>L’</a:t>
             </a:r>
             <a:r>
-              <a:rPr lang="fr-CA" b="1"/>
+              <a:rPr lang="fr-CA" b="1" dirty="0"/>
               <a:t>espacement </a:t>
             </a:r>
             <a:r>
-              <a:rPr lang="fr-CA"/>
+              <a:rPr lang="fr-CA" dirty="0"/>
               <a:t>depuis la gauche / le haut d’un</a:t>
             </a:r>
             <a:r>
-              <a:rPr lang="fr-CA" b="1"/>
+              <a:rPr lang="fr-CA" b="1" dirty="0"/>
               <a:t> élément</a:t>
             </a:r>
-            <a:endParaRPr lang="fr-CA" b="1" dirty="0"/>
           </a:p>
         </p:txBody>
       </p:sp>
@@ -15095,6 +15080,15 @@
 </file>
 
 <file path=customXml/item1.xml><?xml version="1.0" encoding="utf-8"?>
+<?mso-contentType ?>
+<FormTemplates xmlns="http://schemas.microsoft.com/sharepoint/v3/contenttype/forms">
+  <Display>DocumentLibraryForm</Display>
+  <Edit>DocumentLibraryForm</Edit>
+  <New>DocumentLibraryForm</New>
+</FormTemplates>
+</file>
+
+<file path=customXml/item2.xml><?xml version="1.0" encoding="utf-8"?>
 <ct:contentTypeSchema xmlns:ct="http://schemas.microsoft.com/office/2006/metadata/contentType" xmlns:ma="http://schemas.microsoft.com/office/2006/metadata/properties/metaAttributes" ct:_="" ma:_="" ma:contentTypeName="Document" ma:contentTypeID="0x01010062E8CCA7FB9EAE4D9797B5C1381037FC" ma:contentTypeVersion="9" ma:contentTypeDescription="Create a new document." ma:contentTypeScope="" ma:versionID="020e06b287671e86e91b3e1b12ab4816">
   <xsd:schema xmlns:xsd="http://www.w3.org/2001/XMLSchema" xmlns:xs="http://www.w3.org/2001/XMLSchema" xmlns:p="http://schemas.microsoft.com/office/2006/metadata/properties" xmlns:ns2="83ab252c-4429-4d3c-b354-a26bac7f17c4" targetNamespace="http://schemas.microsoft.com/office/2006/metadata/properties" ma:root="true" ma:fieldsID="a7531f0ded98428dc5aa0cd72d251711" ns2:_="">
     <xsd:import namespace="83ab252c-4429-4d3c-b354-a26bac7f17c4"/>
@@ -15272,15 +15266,6 @@
 </ct:contentTypeSchema>
 </file>
 
-<file path=customXml/item2.xml><?xml version="1.0" encoding="utf-8"?>
-<?mso-contentType ?>
-<FormTemplates xmlns="http://schemas.microsoft.com/sharepoint/v3/contenttype/forms">
-  <Display>DocumentLibraryForm</Display>
-  <Edit>DocumentLibraryForm</Edit>
-  <New>DocumentLibraryForm</New>
-</FormTemplates>
-</file>
-
 <file path=customXml/item3.xml><?xml version="1.0" encoding="utf-8"?>
 <p:properties xmlns:p="http://schemas.microsoft.com/office/2006/metadata/properties" xmlns:xsi="http://www.w3.org/2001/XMLSchema-instance" xmlns:pc="http://schemas.microsoft.com/office/infopath/2007/PartnerControls">
   <documentManagement/>
@@ -15288,13 +15273,36 @@
 </file>
 
 <file path=customXml/itemProps1.xml><?xml version="1.0" encoding="utf-8"?>
-<ds:datastoreItem xmlns:ds="http://schemas.openxmlformats.org/officeDocument/2006/customXml" ds:itemID="{A5D4AE9F-B01C-455F-A14D-6ED46E899AA8}"/>
+<ds:datastoreItem xmlns:ds="http://schemas.openxmlformats.org/officeDocument/2006/customXml" ds:itemID="{B4652E77-4955-493E-BE66-838A23DC46A5}">
+  <ds:schemaRefs>
+    <ds:schemaRef ds:uri="http://schemas.microsoft.com/sharepoint/v3/contenttype/forms"/>
+  </ds:schemaRefs>
+</ds:datastoreItem>
 </file>
 
 <file path=customXml/itemProps2.xml><?xml version="1.0" encoding="utf-8"?>
-<ds:datastoreItem xmlns:ds="http://schemas.openxmlformats.org/officeDocument/2006/customXml" ds:itemID="{B4652E77-4955-493E-BE66-838A23DC46A5}"/>
+<ds:datastoreItem xmlns:ds="http://schemas.openxmlformats.org/officeDocument/2006/customXml" ds:itemID="{A5D4AE9F-B01C-455F-A14D-6ED46E899AA8}">
+  <ds:schemaRefs>
+    <ds:schemaRef ds:uri="http://schemas.microsoft.com/office/2006/metadata/contentType"/>
+    <ds:schemaRef ds:uri="http://schemas.microsoft.com/office/2006/metadata/properties/metaAttributes"/>
+    <ds:schemaRef ds:uri="http://www.w3.org/2001/XMLSchema"/>
+    <ds:schemaRef ds:uri="http://schemas.microsoft.com/office/2006/metadata/properties"/>
+    <ds:schemaRef ds:uri="83ab252c-4429-4d3c-b354-a26bac7f17c4"/>
+    <ds:schemaRef ds:uri="http://schemas.microsoft.com/office/2006/documentManagement/types"/>
+    <ds:schemaRef ds:uri="http://schemas.microsoft.com/office/infopath/2007/PartnerControls"/>
+    <ds:schemaRef ds:uri="http://schemas.openxmlformats.org/package/2006/metadata/core-properties"/>
+    <ds:schemaRef ds:uri="http://purl.org/dc/elements/1.1/"/>
+    <ds:schemaRef ds:uri="http://purl.org/dc/terms/"/>
+    <ds:schemaRef ds:uri="http://schemas.microsoft.com/internal/obd"/>
+  </ds:schemaRefs>
+</ds:datastoreItem>
 </file>
 
 <file path=customXml/itemProps3.xml><?xml version="1.0" encoding="utf-8"?>
-<ds:datastoreItem xmlns:ds="http://schemas.openxmlformats.org/officeDocument/2006/customXml" ds:itemID="{6CFAAF9F-4D91-4A53-AD87-F90AE21F3406}"/>
+<ds:datastoreItem xmlns:ds="http://schemas.openxmlformats.org/officeDocument/2006/customXml" ds:itemID="{6CFAAF9F-4D91-4A53-AD87-F90AE21F3406}">
+  <ds:schemaRefs>
+    <ds:schemaRef ds:uri="http://schemas.microsoft.com/office/2006/metadata/properties"/>
+    <ds:schemaRef ds:uri="http://schemas.microsoft.com/office/infopath/2007/PartnerControls"/>
+  </ds:schemaRefs>
+</ds:datastoreItem>
 </file>